--- a/docs/02 Performance Latency and Cost Optimization.pptx
+++ b/docs/02 Performance Latency and Cost Optimization.pptx
@@ -7,25 +7,28 @@
   </p:sldMasterIdLst>
   <p:sldIdLst>
     <p:sldId id="256" r:id="rId3"/>
-    <p:sldId id="262" r:id="rId4"/>
-    <p:sldId id="264" r:id="rId5"/>
-    <p:sldId id="257" r:id="rId6"/>
-    <p:sldId id="283" r:id="rId7"/>
-    <p:sldId id="284" r:id="rId8"/>
-    <p:sldId id="285" r:id="rId9"/>
-    <p:sldId id="286" r:id="rId10"/>
-    <p:sldId id="287" r:id="rId11"/>
-    <p:sldId id="288" r:id="rId12"/>
-    <p:sldId id="299" r:id="rId13"/>
-    <p:sldId id="290" r:id="rId14"/>
-    <p:sldId id="292" r:id="rId15"/>
-    <p:sldId id="293" r:id="rId16"/>
-    <p:sldId id="294" r:id="rId17"/>
-    <p:sldId id="295" r:id="rId18"/>
-    <p:sldId id="300" r:id="rId19"/>
-    <p:sldId id="301" r:id="rId20"/>
-    <p:sldId id="282" r:id="rId21"/>
-    <p:sldId id="277" r:id="rId22"/>
+    <p:sldId id="303" r:id="rId4"/>
+    <p:sldId id="262" r:id="rId5"/>
+    <p:sldId id="264" r:id="rId6"/>
+    <p:sldId id="257" r:id="rId7"/>
+    <p:sldId id="283" r:id="rId8"/>
+    <p:sldId id="284" r:id="rId9"/>
+    <p:sldId id="285" r:id="rId10"/>
+    <p:sldId id="286" r:id="rId11"/>
+    <p:sldId id="287" r:id="rId12"/>
+    <p:sldId id="288" r:id="rId13"/>
+    <p:sldId id="299" r:id="rId14"/>
+    <p:sldId id="290" r:id="rId15"/>
+    <p:sldId id="292" r:id="rId16"/>
+    <p:sldId id="293" r:id="rId17"/>
+    <p:sldId id="294" r:id="rId18"/>
+    <p:sldId id="295" r:id="rId19"/>
+    <p:sldId id="300" r:id="rId20"/>
+    <p:sldId id="301" r:id="rId21"/>
+    <p:sldId id="282" r:id="rId22"/>
+    <p:sldId id="350" r:id="rId23"/>
+    <p:sldId id="304" r:id="rId24"/>
+    <p:sldId id="351" r:id="rId25"/>
   </p:sldIdLst>
   <p:sldSz cx="12192000" cy="6858000"/>
   <p:notesSz cx="6858000" cy="9144000"/>
@@ -281,7 +284,7 @@
           <a:p>
             <a:fld id="{CF9BD994-088D-4DFC-A63A-488DD3725837}" type="datetimeFigureOut">
               <a:rPr lang="en-IN" smtClean="0"/>
-              <a:t>20-04-2026</a:t>
+              <a:t>25-09-2026</a:t>
             </a:fld>
             <a:endParaRPr lang="en-IN"/>
           </a:p>
@@ -481,7 +484,7 @@
           <a:p>
             <a:fld id="{CF9BD994-088D-4DFC-A63A-488DD3725837}" type="datetimeFigureOut">
               <a:rPr lang="en-IN" smtClean="0"/>
-              <a:t>20-04-2026</a:t>
+              <a:t>25-09-2026</a:t>
             </a:fld>
             <a:endParaRPr lang="en-IN"/>
           </a:p>
@@ -691,7 +694,7 @@
           <a:p>
             <a:fld id="{CF9BD994-088D-4DFC-A63A-488DD3725837}" type="datetimeFigureOut">
               <a:rPr lang="en-IN" smtClean="0"/>
-              <a:t>20-04-2026</a:t>
+              <a:t>25-09-2026</a:t>
             </a:fld>
             <a:endParaRPr lang="en-IN"/>
           </a:p>
@@ -913,7 +916,7 @@
           <a:p>
             <a:fld id="{4F816CEB-1072-4B22-A473-588D7AF62EB2}" type="datetimeFigureOut">
               <a:rPr lang="en-IN" smtClean="0"/>
-              <a:t>20-04-2026</a:t>
+              <a:t>25-09-2026</a:t>
             </a:fld>
             <a:endParaRPr lang="en-IN"/>
           </a:p>
@@ -1113,7 +1116,7 @@
           <a:p>
             <a:fld id="{4F816CEB-1072-4B22-A473-588D7AF62EB2}" type="datetimeFigureOut">
               <a:rPr lang="en-IN" smtClean="0"/>
-              <a:t>20-04-2026</a:t>
+              <a:t>25-09-2026</a:t>
             </a:fld>
             <a:endParaRPr lang="en-IN"/>
           </a:p>
@@ -1389,7 +1392,7 @@
           <a:p>
             <a:fld id="{4F816CEB-1072-4B22-A473-588D7AF62EB2}" type="datetimeFigureOut">
               <a:rPr lang="en-IN" smtClean="0"/>
-              <a:t>20-04-2026</a:t>
+              <a:t>25-09-2026</a:t>
             </a:fld>
             <a:endParaRPr lang="en-IN"/>
           </a:p>
@@ -1657,7 +1660,7 @@
           <a:p>
             <a:fld id="{4F816CEB-1072-4B22-A473-588D7AF62EB2}" type="datetimeFigureOut">
               <a:rPr lang="en-IN" smtClean="0"/>
-              <a:t>20-04-2026</a:t>
+              <a:t>25-09-2026</a:t>
             </a:fld>
             <a:endParaRPr lang="en-IN"/>
           </a:p>
@@ -2072,7 +2075,7 @@
           <a:p>
             <a:fld id="{4F816CEB-1072-4B22-A473-588D7AF62EB2}" type="datetimeFigureOut">
               <a:rPr lang="en-IN" smtClean="0"/>
-              <a:t>20-04-2026</a:t>
+              <a:t>25-09-2026</a:t>
             </a:fld>
             <a:endParaRPr lang="en-IN"/>
           </a:p>
@@ -2214,7 +2217,7 @@
           <a:p>
             <a:fld id="{4F816CEB-1072-4B22-A473-588D7AF62EB2}" type="datetimeFigureOut">
               <a:rPr lang="en-IN" smtClean="0"/>
-              <a:t>20-04-2026</a:t>
+              <a:t>25-09-2026</a:t>
             </a:fld>
             <a:endParaRPr lang="en-IN"/>
           </a:p>
@@ -2327,7 +2330,7 @@
           <a:p>
             <a:fld id="{4F816CEB-1072-4B22-A473-588D7AF62EB2}" type="datetimeFigureOut">
               <a:rPr lang="en-IN" smtClean="0"/>
-              <a:t>20-04-2026</a:t>
+              <a:t>25-09-2026</a:t>
             </a:fld>
             <a:endParaRPr lang="en-IN"/>
           </a:p>
@@ -2640,7 +2643,7 @@
           <a:p>
             <a:fld id="{4F816CEB-1072-4B22-A473-588D7AF62EB2}" type="datetimeFigureOut">
               <a:rPr lang="en-IN" smtClean="0"/>
-              <a:t>20-04-2026</a:t>
+              <a:t>25-09-2026</a:t>
             </a:fld>
             <a:endParaRPr lang="en-IN"/>
           </a:p>
@@ -2840,7 +2843,7 @@
           <a:p>
             <a:fld id="{CF9BD994-088D-4DFC-A63A-488DD3725837}" type="datetimeFigureOut">
               <a:rPr lang="en-IN" smtClean="0"/>
-              <a:t>20-04-2026</a:t>
+              <a:t>25-09-2026</a:t>
             </a:fld>
             <a:endParaRPr lang="en-IN"/>
           </a:p>
@@ -3129,7 +3132,7 @@
           <a:p>
             <a:fld id="{4F816CEB-1072-4B22-A473-588D7AF62EB2}" type="datetimeFigureOut">
               <a:rPr lang="en-IN" smtClean="0"/>
-              <a:t>20-04-2026</a:t>
+              <a:t>25-09-2026</a:t>
             </a:fld>
             <a:endParaRPr lang="en-IN"/>
           </a:p>
@@ -3329,7 +3332,7 @@
           <a:p>
             <a:fld id="{4F816CEB-1072-4B22-A473-588D7AF62EB2}" type="datetimeFigureOut">
               <a:rPr lang="en-IN" smtClean="0"/>
-              <a:t>20-04-2026</a:t>
+              <a:t>25-09-2026</a:t>
             </a:fld>
             <a:endParaRPr lang="en-IN"/>
           </a:p>
@@ -3539,7 +3542,7 @@
           <a:p>
             <a:fld id="{4F816CEB-1072-4B22-A473-588D7AF62EB2}" type="datetimeFigureOut">
               <a:rPr lang="en-IN" smtClean="0"/>
-              <a:t>20-04-2026</a:t>
+              <a:t>25-09-2026</a:t>
             </a:fld>
             <a:endParaRPr lang="en-IN"/>
           </a:p>
@@ -3925,7 +3928,7 @@
           <a:p>
             <a:fld id="{CF9BD994-088D-4DFC-A63A-488DD3725837}" type="datetimeFigureOut">
               <a:rPr lang="en-IN" smtClean="0"/>
-              <a:t>20-04-2026</a:t>
+              <a:t>25-09-2026</a:t>
             </a:fld>
             <a:endParaRPr lang="en-IN"/>
           </a:p>
@@ -4193,7 +4196,7 @@
           <a:p>
             <a:fld id="{CF9BD994-088D-4DFC-A63A-488DD3725837}" type="datetimeFigureOut">
               <a:rPr lang="en-IN" smtClean="0"/>
-              <a:t>20-04-2026</a:t>
+              <a:t>25-09-2026</a:t>
             </a:fld>
             <a:endParaRPr lang="en-IN"/>
           </a:p>
@@ -4608,7 +4611,7 @@
           <a:p>
             <a:fld id="{CF9BD994-088D-4DFC-A63A-488DD3725837}" type="datetimeFigureOut">
               <a:rPr lang="en-IN" smtClean="0"/>
-              <a:t>20-04-2026</a:t>
+              <a:t>25-09-2026</a:t>
             </a:fld>
             <a:endParaRPr lang="en-IN"/>
           </a:p>
@@ -4750,7 +4753,7 @@
           <a:p>
             <a:fld id="{CF9BD994-088D-4DFC-A63A-488DD3725837}" type="datetimeFigureOut">
               <a:rPr lang="en-IN" smtClean="0"/>
-              <a:t>20-04-2026</a:t>
+              <a:t>25-09-2026</a:t>
             </a:fld>
             <a:endParaRPr lang="en-IN"/>
           </a:p>
@@ -4863,7 +4866,7 @@
           <a:p>
             <a:fld id="{CF9BD994-088D-4DFC-A63A-488DD3725837}" type="datetimeFigureOut">
               <a:rPr lang="en-IN" smtClean="0"/>
-              <a:t>20-04-2026</a:t>
+              <a:t>25-09-2026</a:t>
             </a:fld>
             <a:endParaRPr lang="en-IN"/>
           </a:p>
@@ -5176,7 +5179,7 @@
           <a:p>
             <a:fld id="{CF9BD994-088D-4DFC-A63A-488DD3725837}" type="datetimeFigureOut">
               <a:rPr lang="en-IN" smtClean="0"/>
-              <a:t>20-04-2026</a:t>
+              <a:t>25-09-2026</a:t>
             </a:fld>
             <a:endParaRPr lang="en-IN"/>
           </a:p>
@@ -5465,7 +5468,7 @@
           <a:p>
             <a:fld id="{CF9BD994-088D-4DFC-A63A-488DD3725837}" type="datetimeFigureOut">
               <a:rPr lang="en-IN" smtClean="0"/>
-              <a:t>20-04-2026</a:t>
+              <a:t>25-09-2026</a:t>
             </a:fld>
             <a:endParaRPr lang="en-IN"/>
           </a:p>
@@ -5708,7 +5711,7 @@
           <a:p>
             <a:fld id="{CF9BD994-088D-4DFC-A63A-488DD3725837}" type="datetimeFigureOut">
               <a:rPr lang="en-IN" smtClean="0"/>
-              <a:t>20-04-2026</a:t>
+              <a:t>25-09-2026</a:t>
             </a:fld>
             <a:endParaRPr lang="en-IN"/>
           </a:p>
@@ -6278,7 +6281,7 @@
           <a:p>
             <a:fld id="{4F816CEB-1072-4B22-A473-588D7AF62EB2}" type="datetimeFigureOut">
               <a:rPr lang="en-IN" smtClean="0"/>
-              <a:t>20-04-2026</a:t>
+              <a:t>25-09-2026</a:t>
             </a:fld>
             <a:endParaRPr lang="en-IN"/>
           </a:p>
@@ -6775,6 +6778,195 @@
         <p:cNvPr id="1" name="">
           <a:extLst>
             <a:ext uri="{FF2B5EF4-FFF2-40B4-BE49-F238E27FC236}">
+              <a16:creationId xmlns:a16="http://schemas.microsoft.com/office/drawing/2014/main" id="{6D01CF05-4DDB-0A5D-FCE5-CA24F427A176}"/>
+            </a:ext>
+          </a:extLst>
+        </p:cNvPr>
+        <p:cNvGrpSpPr/>
+        <p:nvPr/>
+      </p:nvGrpSpPr>
+      <p:grpSpPr>
+        <a:xfrm>
+          <a:off x="0" y="0"/>
+          <a:ext cx="0" cy="0"/>
+          <a:chOff x="0" y="0"/>
+          <a:chExt cx="0" cy="0"/>
+        </a:xfrm>
+      </p:grpSpPr>
+      <p:sp>
+        <p:nvSpPr>
+          <p:cNvPr id="2" name="Title 1">
+            <a:extLst>
+              <a:ext uri="{FF2B5EF4-FFF2-40B4-BE49-F238E27FC236}">
+                <a16:creationId xmlns:a16="http://schemas.microsoft.com/office/drawing/2014/main" id="{BD478CC1-084D-117C-D2A4-5CB3597EBF70}"/>
+              </a:ext>
+            </a:extLst>
+          </p:cNvPr>
+          <p:cNvSpPr>
+            <a:spLocks noGrp="1"/>
+          </p:cNvSpPr>
+          <p:nvPr>
+            <p:ph type="title"/>
+          </p:nvPr>
+        </p:nvSpPr>
+        <p:spPr/>
+        <p:txBody>
+          <a:bodyPr/>
+          <a:lstStyle/>
+          <a:p>
+            <a:r>
+              <a:rPr lang="en-IN" dirty="0"/>
+              <a:t>Latency Optimization</a:t>
+            </a:r>
+          </a:p>
+        </p:txBody>
+      </p:sp>
+      <p:sp>
+        <p:nvSpPr>
+          <p:cNvPr id="3" name="Content Placeholder 2">
+            <a:extLst>
+              <a:ext uri="{FF2B5EF4-FFF2-40B4-BE49-F238E27FC236}">
+                <a16:creationId xmlns:a16="http://schemas.microsoft.com/office/drawing/2014/main" id="{BF342CF7-D1F3-9C7D-F1BD-677E78DB93E0}"/>
+              </a:ext>
+            </a:extLst>
+          </p:cNvPr>
+          <p:cNvSpPr>
+            <a:spLocks noGrp="1"/>
+          </p:cNvSpPr>
+          <p:nvPr>
+            <p:ph idx="1"/>
+          </p:nvPr>
+        </p:nvSpPr>
+        <p:spPr/>
+        <p:txBody>
+          <a:bodyPr>
+            <a:normAutofit fontScale="92500" lnSpcReduction="20000"/>
+          </a:bodyPr>
+          <a:lstStyle/>
+          <a:p>
+            <a:r>
+              <a:rPr lang="en-US" b="1" dirty="0"/>
+              <a:t>Async LLM Calls</a:t>
+            </a:r>
+          </a:p>
+          <a:p>
+            <a:pPr lvl="1"/>
+            <a:r>
+              <a:rPr lang="en-US" b="1" dirty="0"/>
+              <a:t>Idea</a:t>
+            </a:r>
+          </a:p>
+          <a:p>
+            <a:pPr lvl="2"/>
+            <a:r>
+              <a:rPr lang="en-US" dirty="0"/>
+              <a:t>Don’t wait for one call to finish before starting another</a:t>
+            </a:r>
+          </a:p>
+          <a:p>
+            <a:pPr lvl="1"/>
+            <a:endParaRPr lang="en-US" b="1" dirty="0"/>
+          </a:p>
+          <a:p>
+            <a:pPr lvl="1"/>
+            <a:r>
+              <a:rPr lang="en-US" b="1" dirty="0"/>
+              <a:t>Example</a:t>
+            </a:r>
+          </a:p>
+          <a:p>
+            <a:pPr lvl="2"/>
+            <a:r>
+              <a:rPr lang="en-US" dirty="0"/>
+              <a:t>Instead of:</a:t>
+            </a:r>
+          </a:p>
+          <a:p>
+            <a:pPr lvl="3"/>
+            <a:r>
+              <a:rPr lang="en-US" dirty="0"/>
+              <a:t>Get summary </a:t>
+            </a:r>
+          </a:p>
+          <a:p>
+            <a:pPr lvl="3"/>
+            <a:r>
+              <a:rPr lang="en-US" dirty="0"/>
+              <a:t>Then generate keywords </a:t>
+            </a:r>
+          </a:p>
+          <a:p>
+            <a:pPr lvl="3"/>
+            <a:r>
+              <a:rPr lang="en-US" dirty="0"/>
+              <a:t>Then classify </a:t>
+            </a:r>
+          </a:p>
+          <a:p>
+            <a:pPr lvl="3"/>
+            <a:r>
+              <a:rPr lang="en-US" dirty="0"/>
+              <a:t>Do:</a:t>
+            </a:r>
+          </a:p>
+          <a:p>
+            <a:pPr lvl="4"/>
+            <a:r>
+              <a:rPr lang="en-US" dirty="0"/>
+              <a:t>Run all 3 at the same time</a:t>
+            </a:r>
+          </a:p>
+          <a:p>
+            <a:pPr lvl="2"/>
+            <a:endParaRPr lang="en-US" b="1" dirty="0"/>
+          </a:p>
+          <a:p>
+            <a:pPr lvl="2"/>
+            <a:r>
+              <a:rPr lang="en-US" b="1" dirty="0"/>
+              <a:t>Result</a:t>
+            </a:r>
+          </a:p>
+          <a:p>
+            <a:pPr lvl="3"/>
+            <a:r>
+              <a:rPr lang="en-US" dirty="0"/>
+              <a:t>Sequential: 6 seconds </a:t>
+            </a:r>
+          </a:p>
+          <a:p>
+            <a:pPr lvl="3"/>
+            <a:r>
+              <a:rPr lang="en-US" dirty="0"/>
+              <a:t>Async: 2 seconds</a:t>
+            </a:r>
+          </a:p>
+          <a:p>
+            <a:endParaRPr lang="en-US" dirty="0"/>
+          </a:p>
+        </p:txBody>
+      </p:sp>
+    </p:spTree>
+    <p:extLst>
+      <p:ext uri="{BB962C8B-B14F-4D97-AF65-F5344CB8AC3E}">
+        <p14:creationId xmlns:p14="http://schemas.microsoft.com/office/powerpoint/2010/main" val="2153786112"/>
+      </p:ext>
+    </p:extLst>
+  </p:cSld>
+  <p:clrMapOvr>
+    <a:masterClrMapping/>
+  </p:clrMapOvr>
+</p:sld>
+</file>
+
+<file path=ppt/slides/slide11.xml><?xml version="1.0" encoding="utf-8"?>
+<p:sld xmlns:a="http://schemas.openxmlformats.org/drawingml/2006/main" xmlns:r="http://schemas.openxmlformats.org/officeDocument/2006/relationships" xmlns:p="http://schemas.openxmlformats.org/presentationml/2006/main">
+  <p:cSld>
+    <p:spTree>
+      <p:nvGrpSpPr>
+        <p:cNvPr id="1" name="">
+          <a:extLst>
+            <a:ext uri="{FF2B5EF4-FFF2-40B4-BE49-F238E27FC236}">
               <a16:creationId xmlns:a16="http://schemas.microsoft.com/office/drawing/2014/main" id="{3573553B-05EF-419D-4DD1-A1DB7C6379B5}"/>
             </a:ext>
           </a:extLst>
@@ -6958,7 +7150,7 @@
 </p:sld>
 </file>
 
-<file path=ppt/slides/slide11.xml><?xml version="1.0" encoding="utf-8"?>
+<file path=ppt/slides/slide12.xml><?xml version="1.0" encoding="utf-8"?>
 <p:sld xmlns:a="http://schemas.openxmlformats.org/drawingml/2006/main" xmlns:r="http://schemas.openxmlformats.org/officeDocument/2006/relationships" xmlns:p="http://schemas.openxmlformats.org/presentationml/2006/main">
   <p:cSld>
     <p:spTree>
@@ -7083,7 +7275,7 @@
 </p:sld>
 </file>
 
-<file path=ppt/slides/slide12.xml><?xml version="1.0" encoding="utf-8"?>
+<file path=ppt/slides/slide13.xml><?xml version="1.0" encoding="utf-8"?>
 <p:sld xmlns:a="http://schemas.openxmlformats.org/drawingml/2006/main" xmlns:r="http://schemas.openxmlformats.org/officeDocument/2006/relationships" xmlns:p="http://schemas.openxmlformats.org/presentationml/2006/main">
   <p:cSld>
     <p:spTree>
@@ -7267,7 +7459,7 @@
 </p:sld>
 </file>
 
-<file path=ppt/slides/slide13.xml><?xml version="1.0" encoding="utf-8"?>
+<file path=ppt/slides/slide14.xml><?xml version="1.0" encoding="utf-8"?>
 <p:sld xmlns:a="http://schemas.openxmlformats.org/drawingml/2006/main" xmlns:r="http://schemas.openxmlformats.org/officeDocument/2006/relationships" xmlns:p="http://schemas.openxmlformats.org/presentationml/2006/main">
   <p:cSld>
     <p:bg>
@@ -7439,7 +7631,7 @@
 </p:sld>
 </file>
 
-<file path=ppt/slides/slide14.xml><?xml version="1.0" encoding="utf-8"?>
+<file path=ppt/slides/slide15.xml><?xml version="1.0" encoding="utf-8"?>
 <p:sld xmlns:a="http://schemas.openxmlformats.org/drawingml/2006/main" xmlns:r="http://schemas.openxmlformats.org/officeDocument/2006/relationships" xmlns:p="http://schemas.openxmlformats.org/presentationml/2006/main">
   <p:cSld>
     <p:spTree>
@@ -7533,21 +7725,21 @@
             </a:r>
           </a:p>
           <a:p>
-            <a:pPr lvl="2"/>
+            <a:pPr lvl="3"/>
             <a:r>
               <a:rPr lang="en-US" dirty="0"/>
               <a:t>Timeout </a:t>
             </a:r>
           </a:p>
           <a:p>
-            <a:pPr lvl="2"/>
+            <a:pPr lvl="3"/>
             <a:r>
               <a:rPr lang="en-US" dirty="0"/>
               <a:t>Hallucination </a:t>
             </a:r>
           </a:p>
           <a:p>
-            <a:pPr lvl="2"/>
+            <a:pPr lvl="3"/>
             <a:r>
               <a:rPr lang="en-US" dirty="0"/>
               <a:t>API errors </a:t>
@@ -7630,7 +7822,7 @@
 </p:sld>
 </file>
 
-<file path=ppt/slides/slide15.xml><?xml version="1.0" encoding="utf-8"?>
+<file path=ppt/slides/slide16.xml><?xml version="1.0" encoding="utf-8"?>
 <p:sld xmlns:a="http://schemas.openxmlformats.org/drawingml/2006/main" xmlns:r="http://schemas.openxmlformats.org/officeDocument/2006/relationships" xmlns:p="http://schemas.openxmlformats.org/presentationml/2006/main">
   <p:cSld>
     <p:spTree>
@@ -7822,7 +8014,7 @@
 </p:sld>
 </file>
 
-<file path=ppt/slides/slide16.xml><?xml version="1.0" encoding="utf-8"?>
+<file path=ppt/slides/slide17.xml><?xml version="1.0" encoding="utf-8"?>
 <p:sld xmlns:a="http://schemas.openxmlformats.org/drawingml/2006/main" xmlns:r="http://schemas.openxmlformats.org/officeDocument/2006/relationships" xmlns:p="http://schemas.openxmlformats.org/presentationml/2006/main">
   <p:cSld>
     <p:spTree>
@@ -7996,7 +8188,7 @@
 </p:sld>
 </file>
 
-<file path=ppt/slides/slide17.xml><?xml version="1.0" encoding="utf-8"?>
+<file path=ppt/slides/slide18.xml><?xml version="1.0" encoding="utf-8"?>
 <p:sld xmlns:a="http://schemas.openxmlformats.org/drawingml/2006/main" xmlns:r="http://schemas.openxmlformats.org/officeDocument/2006/relationships" xmlns:p="http://schemas.openxmlformats.org/presentationml/2006/main">
   <p:cSld>
     <p:spTree>
@@ -8172,7 +8364,7 @@
 </p:sld>
 </file>
 
-<file path=ppt/slides/slide18.xml><?xml version="1.0" encoding="utf-8"?>
+<file path=ppt/slides/slide19.xml><?xml version="1.0" encoding="utf-8"?>
 <p:sld xmlns:a="http://schemas.openxmlformats.org/drawingml/2006/main" xmlns:r="http://schemas.openxmlformats.org/officeDocument/2006/relationships" xmlns:p="http://schemas.openxmlformats.org/presentationml/2006/main">
   <p:cSld>
     <p:spTree>
@@ -8339,7 +8531,112 @@
 </p:sld>
 </file>
 
-<file path=ppt/slides/slide19.xml><?xml version="1.0" encoding="utf-8"?>
+<file path=ppt/slides/slide2.xml><?xml version="1.0" encoding="utf-8"?>
+<p:sld xmlns:a="http://schemas.openxmlformats.org/drawingml/2006/main" xmlns:r="http://schemas.openxmlformats.org/officeDocument/2006/relationships" xmlns:p="http://schemas.openxmlformats.org/presentationml/2006/main">
+  <p:cSld>
+    <p:spTree>
+      <p:nvGrpSpPr>
+        <p:cNvPr id="1" name=""/>
+        <p:cNvGrpSpPr/>
+        <p:nvPr/>
+      </p:nvGrpSpPr>
+      <p:grpSpPr>
+        <a:xfrm>
+          <a:off x="0" y="0"/>
+          <a:ext cx="0" cy="0"/>
+          <a:chOff x="0" y="0"/>
+          <a:chExt cx="0" cy="0"/>
+        </a:xfrm>
+      </p:grpSpPr>
+      <p:sp>
+        <p:nvSpPr>
+          <p:cNvPr id="2" name="Title 1">
+            <a:extLst>
+              <a:ext uri="{FF2B5EF4-FFF2-40B4-BE49-F238E27FC236}">
+                <a16:creationId xmlns:a16="http://schemas.microsoft.com/office/drawing/2014/main" id="{CBD18948-EEF8-4DD6-E0F2-5D46ABF12ED3}"/>
+              </a:ext>
+            </a:extLst>
+          </p:cNvPr>
+          <p:cNvSpPr>
+            <a:spLocks noGrp="1"/>
+          </p:cNvSpPr>
+          <p:nvPr>
+            <p:ph type="title"/>
+          </p:nvPr>
+        </p:nvSpPr>
+        <p:spPr/>
+        <p:txBody>
+          <a:bodyPr/>
+          <a:lstStyle/>
+          <a:p>
+            <a:r>
+              <a:rPr lang="en-US" dirty="0"/>
+              <a:t>Connect</a:t>
+            </a:r>
+            <a:endParaRPr lang="en-IN" dirty="0"/>
+          </a:p>
+        </p:txBody>
+      </p:sp>
+      <p:sp>
+        <p:nvSpPr>
+          <p:cNvPr id="3" name="Content Placeholder 2">
+            <a:extLst>
+              <a:ext uri="{FF2B5EF4-FFF2-40B4-BE49-F238E27FC236}">
+                <a16:creationId xmlns:a16="http://schemas.microsoft.com/office/drawing/2014/main" id="{84E05481-C77F-A06F-39DF-2B28E6913144}"/>
+              </a:ext>
+            </a:extLst>
+          </p:cNvPr>
+          <p:cNvSpPr>
+            <a:spLocks noGrp="1"/>
+          </p:cNvSpPr>
+          <p:nvPr>
+            <p:ph idx="1"/>
+          </p:nvPr>
+        </p:nvSpPr>
+        <p:spPr/>
+        <p:txBody>
+          <a:bodyPr/>
+          <a:lstStyle/>
+          <a:p>
+            <a:r>
+              <a:rPr lang="en-US" dirty="0">
+                <a:hlinkClick r:id="rId2"/>
+              </a:rPr>
+              <a:t>Ajay.Singala@gmail.com</a:t>
+            </a:r>
+            <a:endParaRPr lang="en-US" dirty="0"/>
+          </a:p>
+          <a:p>
+            <a:endParaRPr lang="en-US" dirty="0"/>
+          </a:p>
+          <a:p>
+            <a:r>
+              <a:rPr lang="en-IN" dirty="0">
+                <a:hlinkClick r:id="rId3"/>
+              </a:rPr>
+              <a:t>https://www.linkedin.com/in/ajay-singala-bb0b771/</a:t>
+            </a:r>
+            <a:r>
+              <a:rPr lang="en-IN" dirty="0"/>
+              <a:t> </a:t>
+            </a:r>
+          </a:p>
+        </p:txBody>
+      </p:sp>
+    </p:spTree>
+    <p:extLst>
+      <p:ext uri="{BB962C8B-B14F-4D97-AF65-F5344CB8AC3E}">
+        <p14:creationId xmlns:p14="http://schemas.microsoft.com/office/powerpoint/2010/main" val="888504996"/>
+      </p:ext>
+    </p:extLst>
+  </p:cSld>
+  <p:clrMapOvr>
+    <a:masterClrMapping/>
+  </p:clrMapOvr>
+</p:sld>
+</file>
+
+<file path=ppt/slides/slide20.xml><?xml version="1.0" encoding="utf-8"?>
 <p:sld xmlns:a="http://schemas.openxmlformats.org/drawingml/2006/main" xmlns:r="http://schemas.openxmlformats.org/officeDocument/2006/relationships" xmlns:p="http://schemas.openxmlformats.org/presentationml/2006/main">
   <p:cSld>
     <p:spTree>
@@ -8413,12 +8710,12 @@
           <a:lstStyle/>
           <a:p>
             <a:r>
-              <a:rPr lang="en-IN"/>
-              <a:t>Evaluation, Observability &amp; Cost Awareness</a:t>
-            </a:r>
-          </a:p>
-          <a:p>
-            <a:endParaRPr lang="en-IN"/>
+              <a:rPr lang="en-IN" dirty="0"/>
+              <a:t>Performance, Latency &amp; Cost Optimization</a:t>
+            </a:r>
+          </a:p>
+          <a:p>
+            <a:endParaRPr lang="en-IN" dirty="0"/>
           </a:p>
         </p:txBody>
       </p:sp>
@@ -8435,7 +8732,687 @@
 </p:sld>
 </file>
 
-<file path=ppt/slides/slide2.xml><?xml version="1.0" encoding="utf-8"?>
+<file path=ppt/slides/slide21.xml><?xml version="1.0" encoding="utf-8"?>
+<p:sld xmlns:a="http://schemas.openxmlformats.org/drawingml/2006/main" xmlns:r="http://schemas.openxmlformats.org/officeDocument/2006/relationships" xmlns:p="http://schemas.openxmlformats.org/presentationml/2006/main">
+  <p:cSld>
+    <p:spTree>
+      <p:nvGrpSpPr>
+        <p:cNvPr id="1" name="">
+          <a:extLst>
+            <a:ext uri="{FF2B5EF4-FFF2-40B4-BE49-F238E27FC236}">
+              <a16:creationId xmlns:a16="http://schemas.microsoft.com/office/drawing/2014/main" id="{215C9A0F-B371-8350-9043-93BFDF097CBB}"/>
+            </a:ext>
+          </a:extLst>
+        </p:cNvPr>
+        <p:cNvGrpSpPr/>
+        <p:nvPr/>
+      </p:nvGrpSpPr>
+      <p:grpSpPr>
+        <a:xfrm>
+          <a:off x="0" y="0"/>
+          <a:ext cx="0" cy="0"/>
+          <a:chOff x="0" y="0"/>
+          <a:chExt cx="0" cy="0"/>
+        </a:xfrm>
+      </p:grpSpPr>
+      <p:sp>
+        <p:nvSpPr>
+          <p:cNvPr id="2" name="Rectangle 1">
+            <a:extLst>
+              <a:ext uri="{FF2B5EF4-FFF2-40B4-BE49-F238E27FC236}">
+                <a16:creationId xmlns:a16="http://schemas.microsoft.com/office/drawing/2014/main" id="{12866737-057C-CACA-310D-3BFA2DC5D425}"/>
+              </a:ext>
+            </a:extLst>
+          </p:cNvPr>
+          <p:cNvSpPr/>
+          <p:nvPr/>
+        </p:nvSpPr>
+        <p:spPr>
+          <a:xfrm>
+            <a:off x="0" y="0"/>
+            <a:ext cx="12191695" cy="6858000"/>
+          </a:xfrm>
+          <a:prstGeom prst="rect">
+            <a:avLst/>
+          </a:prstGeom>
+          <a:solidFill>
+            <a:srgbClr val="FFFFFF"/>
+          </a:solidFill>
+          <a:ln>
+            <a:noFill/>
+          </a:ln>
+        </p:spPr>
+        <p:style>
+          <a:lnRef idx="1">
+            <a:schemeClr val="accent1"/>
+          </a:lnRef>
+          <a:fillRef idx="3">
+            <a:schemeClr val="accent1"/>
+          </a:fillRef>
+          <a:effectRef idx="2">
+            <a:schemeClr val="accent1"/>
+          </a:effectRef>
+          <a:fontRef idx="minor">
+            <a:schemeClr val="lt1"/>
+          </a:fontRef>
+        </p:style>
+        <p:txBody>
+          <a:bodyPr rtlCol="0" anchor="ctr"/>
+          <a:lstStyle/>
+          <a:p>
+            <a:pPr algn="ctr"/>
+            <a:endParaRPr/>
+          </a:p>
+        </p:txBody>
+      </p:sp>
+      <p:sp>
+        <p:nvSpPr>
+          <p:cNvPr id="4" name="TextBox 3">
+            <a:extLst>
+              <a:ext uri="{FF2B5EF4-FFF2-40B4-BE49-F238E27FC236}">
+                <a16:creationId xmlns:a16="http://schemas.microsoft.com/office/drawing/2014/main" id="{98D9FD59-0B71-1F4F-3702-6B5AE04A6F1F}"/>
+              </a:ext>
+            </a:extLst>
+          </p:cNvPr>
+          <p:cNvSpPr txBox="1"/>
+          <p:nvPr/>
+        </p:nvSpPr>
+        <p:spPr>
+          <a:xfrm>
+            <a:off x="594360" y="566928"/>
+            <a:ext cx="1676549" cy="507831"/>
+          </a:xfrm>
+          <a:prstGeom prst="rect">
+            <a:avLst/>
+          </a:prstGeom>
+          <a:noFill/>
+        </p:spPr>
+        <p:txBody>
+          <a:bodyPr wrap="none">
+            <a:spAutoFit/>
+          </a:bodyPr>
+          <a:lstStyle/>
+          <a:p>
+            <a:pPr>
+              <a:defRPr sz="2700" b="1">
+                <a:solidFill>
+                  <a:srgbClr val="162740"/>
+                </a:solidFill>
+              </a:defRPr>
+            </a:pPr>
+            <a:r>
+              <a:rPr lang="en-US" dirty="0"/>
+              <a:t>T</a:t>
+            </a:r>
+            <a:r>
+              <a:rPr lang="en-IN" dirty="0"/>
+              <a:t>hank you</a:t>
+            </a:r>
+            <a:endParaRPr lang="en-US" dirty="0"/>
+          </a:p>
+        </p:txBody>
+      </p:sp>
+      <p:sp>
+        <p:nvSpPr>
+          <p:cNvPr id="5" name="Rectangle 4">
+            <a:extLst>
+              <a:ext uri="{FF2B5EF4-FFF2-40B4-BE49-F238E27FC236}">
+                <a16:creationId xmlns:a16="http://schemas.microsoft.com/office/drawing/2014/main" id="{5F3B1CEE-1F2F-684C-4123-B9256D195A05}"/>
+              </a:ext>
+            </a:extLst>
+          </p:cNvPr>
+          <p:cNvSpPr/>
+          <p:nvPr/>
+        </p:nvSpPr>
+        <p:spPr>
+          <a:xfrm>
+            <a:off x="594360" y="1234440"/>
+            <a:ext cx="10972800" cy="22860"/>
+          </a:xfrm>
+          <a:prstGeom prst="rect">
+            <a:avLst/>
+          </a:prstGeom>
+          <a:solidFill>
+            <a:srgbClr val="D2DCE8"/>
+          </a:solidFill>
+          <a:ln>
+            <a:noFill/>
+          </a:ln>
+        </p:spPr>
+        <p:style>
+          <a:lnRef idx="1">
+            <a:schemeClr val="accent1"/>
+          </a:lnRef>
+          <a:fillRef idx="3">
+            <a:schemeClr val="accent1"/>
+          </a:fillRef>
+          <a:effectRef idx="2">
+            <a:schemeClr val="accent1"/>
+          </a:effectRef>
+          <a:fontRef idx="minor">
+            <a:schemeClr val="lt1"/>
+          </a:fontRef>
+        </p:style>
+        <p:txBody>
+          <a:bodyPr rtlCol="0" anchor="ctr"/>
+          <a:lstStyle/>
+          <a:p>
+            <a:pPr algn="ctr"/>
+            <a:endParaRPr/>
+          </a:p>
+        </p:txBody>
+      </p:sp>
+      <p:sp>
+        <p:nvSpPr>
+          <p:cNvPr id="11" name="TextBox 10">
+            <a:extLst>
+              <a:ext uri="{FF2B5EF4-FFF2-40B4-BE49-F238E27FC236}">
+                <a16:creationId xmlns:a16="http://schemas.microsoft.com/office/drawing/2014/main" id="{2E6B3DDD-BA13-B226-BB31-F473CBEAB890}"/>
+              </a:ext>
+            </a:extLst>
+          </p:cNvPr>
+          <p:cNvSpPr txBox="1"/>
+          <p:nvPr/>
+        </p:nvSpPr>
+        <p:spPr>
+          <a:xfrm>
+            <a:off x="10881360" y="6446520"/>
+            <a:ext cx="640080" cy="228600"/>
+          </a:xfrm>
+          <a:prstGeom prst="rect">
+            <a:avLst/>
+          </a:prstGeom>
+          <a:noFill/>
+        </p:spPr>
+        <p:txBody>
+          <a:bodyPr wrap="none">
+            <a:spAutoFit/>
+          </a:bodyPr>
+          <a:lstStyle/>
+          <a:p>
+            <a:pPr>
+              <a:defRPr sz="900">
+                <a:solidFill>
+                  <a:srgbClr val="2A5B91"/>
+                </a:solidFill>
+              </a:defRPr>
+            </a:pPr>
+            <a:r>
+              <a:t>40</a:t>
+            </a:r>
+          </a:p>
+        </p:txBody>
+      </p:sp>
+      <p:sp>
+        <p:nvSpPr>
+          <p:cNvPr id="12" name="TextBox 11">
+            <a:extLst>
+              <a:ext uri="{FF2B5EF4-FFF2-40B4-BE49-F238E27FC236}">
+                <a16:creationId xmlns:a16="http://schemas.microsoft.com/office/drawing/2014/main" id="{DF9E9355-B7D8-3500-9EE9-A125054491A1}"/>
+              </a:ext>
+            </a:extLst>
+          </p:cNvPr>
+          <p:cNvSpPr txBox="1"/>
+          <p:nvPr/>
+        </p:nvSpPr>
+        <p:spPr>
+          <a:xfrm>
+            <a:off x="594360" y="6446520"/>
+            <a:ext cx="3657600" cy="228600"/>
+          </a:xfrm>
+          <a:prstGeom prst="rect">
+            <a:avLst/>
+          </a:prstGeom>
+          <a:noFill/>
+        </p:spPr>
+        <p:txBody>
+          <a:bodyPr wrap="none">
+            <a:spAutoFit/>
+          </a:bodyPr>
+          <a:lstStyle/>
+          <a:p>
+            <a:pPr>
+              <a:defRPr sz="800">
+                <a:solidFill>
+                  <a:srgbClr val="78828C"/>
+                </a:solidFill>
+              </a:defRPr>
+            </a:pPr>
+            <a:r>
+              <a:t>Autonomous Agents in Enterprise Software Delivery</a:t>
+            </a:r>
+          </a:p>
+        </p:txBody>
+      </p:sp>
+      <p:sp>
+        <p:nvSpPr>
+          <p:cNvPr id="16" name="TextBox 15">
+            <a:extLst>
+              <a:ext uri="{FF2B5EF4-FFF2-40B4-BE49-F238E27FC236}">
+                <a16:creationId xmlns:a16="http://schemas.microsoft.com/office/drawing/2014/main" id="{947902B2-2D47-011E-7356-2DA2F5A13E72}"/>
+              </a:ext>
+            </a:extLst>
+          </p:cNvPr>
+          <p:cNvSpPr txBox="1"/>
+          <p:nvPr/>
+        </p:nvSpPr>
+        <p:spPr>
+          <a:xfrm>
+            <a:off x="594360" y="1659117"/>
+            <a:ext cx="6140196" cy="2585323"/>
+          </a:xfrm>
+          <a:prstGeom prst="rect">
+            <a:avLst/>
+          </a:prstGeom>
+          <a:noFill/>
+        </p:spPr>
+        <p:txBody>
+          <a:bodyPr wrap="square">
+            <a:spAutoFit/>
+          </a:bodyPr>
+          <a:lstStyle/>
+          <a:p>
+            <a:r>
+              <a:rPr lang="en-IN" dirty="0"/>
+              <a:t>Ajay J. Singala</a:t>
+            </a:r>
+          </a:p>
+          <a:p>
+            <a:endParaRPr lang="en-IN" dirty="0"/>
+          </a:p>
+          <a:p>
+            <a:r>
+              <a:rPr lang="en-IN" dirty="0">
+                <a:hlinkClick r:id="rId2"/>
+              </a:rPr>
+              <a:t>ajay.singala@gmail.com</a:t>
+            </a:r>
+            <a:r>
+              <a:rPr lang="en-IN" dirty="0"/>
+              <a:t> </a:t>
+            </a:r>
+          </a:p>
+          <a:p>
+            <a:endParaRPr lang="en-IN" dirty="0"/>
+          </a:p>
+          <a:p>
+            <a:r>
+              <a:rPr lang="en-IN" dirty="0">
+                <a:hlinkClick r:id="rId3"/>
+              </a:rPr>
+              <a:t>https://www.linkedin.com/in/ajay-singala-bb0b771/</a:t>
+            </a:r>
+            <a:r>
+              <a:rPr lang="en-IN" dirty="0"/>
+              <a:t> </a:t>
+            </a:r>
+          </a:p>
+          <a:p>
+            <a:endParaRPr lang="en-IN" dirty="0"/>
+          </a:p>
+          <a:p>
+            <a:r>
+              <a:rPr lang="en-IN" dirty="0"/>
+              <a:t>Indian Achievers Magazine: </a:t>
+            </a:r>
+            <a:r>
+              <a:rPr lang="en-IN" dirty="0">
+                <a:hlinkClick r:id="rId4"/>
+              </a:rPr>
+              <a:t>https://shorturl.at/lLDdQ</a:t>
+            </a:r>
+            <a:r>
+              <a:rPr lang="en-IN" dirty="0"/>
+              <a:t> </a:t>
+            </a:r>
+          </a:p>
+          <a:p>
+            <a:endParaRPr lang="en-IN" dirty="0"/>
+          </a:p>
+          <a:p>
+            <a:r>
+              <a:rPr lang="en-IN" dirty="0"/>
+              <a:t>Book: </a:t>
+            </a:r>
+            <a:r>
+              <a:rPr lang="en-IN" dirty="0">
+                <a:hlinkClick r:id="rId5"/>
+              </a:rPr>
+              <a:t>https://amzn.in/d/0bnRMSMG</a:t>
+            </a:r>
+            <a:r>
+              <a:rPr lang="en-IN" dirty="0"/>
+              <a:t> </a:t>
+            </a:r>
+          </a:p>
+        </p:txBody>
+      </p:sp>
+    </p:spTree>
+    <p:extLst>
+      <p:ext uri="{BB962C8B-B14F-4D97-AF65-F5344CB8AC3E}">
+        <p14:creationId xmlns:p14="http://schemas.microsoft.com/office/powerpoint/2010/main" val="2262509753"/>
+      </p:ext>
+    </p:extLst>
+  </p:cSld>
+  <p:clrMapOvr>
+    <a:masterClrMapping/>
+  </p:clrMapOvr>
+</p:sld>
+</file>
+
+<file path=ppt/slides/slide22.xml><?xml version="1.0" encoding="utf-8"?>
+<p:sld xmlns:a="http://schemas.openxmlformats.org/drawingml/2006/main" xmlns:r="http://schemas.openxmlformats.org/officeDocument/2006/relationships" xmlns:p="http://schemas.openxmlformats.org/presentationml/2006/main">
+  <p:cSld>
+    <p:spTree>
+      <p:nvGrpSpPr>
+        <p:cNvPr id="1" name=""/>
+        <p:cNvGrpSpPr/>
+        <p:nvPr/>
+      </p:nvGrpSpPr>
+      <p:grpSpPr>
+        <a:xfrm>
+          <a:off x="0" y="0"/>
+          <a:ext cx="0" cy="0"/>
+          <a:chOff x="0" y="0"/>
+          <a:chExt cx="0" cy="0"/>
+        </a:xfrm>
+      </p:grpSpPr>
+      <p:sp>
+        <p:nvSpPr>
+          <p:cNvPr id="2" name="Title 1">
+            <a:extLst>
+              <a:ext uri="{FF2B5EF4-FFF2-40B4-BE49-F238E27FC236}">
+                <a16:creationId xmlns:a16="http://schemas.microsoft.com/office/drawing/2014/main" id="{28FF0454-3D12-1A28-1262-B67604864937}"/>
+              </a:ext>
+            </a:extLst>
+          </p:cNvPr>
+          <p:cNvSpPr>
+            <a:spLocks noGrp="1"/>
+          </p:cNvSpPr>
+          <p:nvPr>
+            <p:ph type="title"/>
+          </p:nvPr>
+        </p:nvSpPr>
+        <p:spPr>
+          <a:xfrm>
+            <a:off x="640080" y="325369"/>
+            <a:ext cx="4368602" cy="1956841"/>
+          </a:xfrm>
+        </p:spPr>
+        <p:txBody>
+          <a:bodyPr anchor="b">
+            <a:normAutofit/>
+          </a:bodyPr>
+          <a:lstStyle/>
+          <a:p>
+            <a:r>
+              <a:rPr lang="en-US" sz="5400"/>
+              <a:t>Thank you</a:t>
+            </a:r>
+            <a:endParaRPr lang="en-IN" sz="5400"/>
+          </a:p>
+        </p:txBody>
+      </p:sp>
+      <p:sp>
+        <p:nvSpPr>
+          <p:cNvPr id="18" name="Content Placeholder 17">
+            <a:extLst>
+              <a:ext uri="{FF2B5EF4-FFF2-40B4-BE49-F238E27FC236}">
+                <a16:creationId xmlns:a16="http://schemas.microsoft.com/office/drawing/2014/main" id="{61055F46-5727-CFD2-D034-987E70DA8272}"/>
+              </a:ext>
+            </a:extLst>
+          </p:cNvPr>
+          <p:cNvSpPr>
+            <a:spLocks noGrp="1"/>
+          </p:cNvSpPr>
+          <p:nvPr>
+            <p:ph idx="1"/>
+          </p:nvPr>
+        </p:nvSpPr>
+        <p:spPr>
+          <a:xfrm>
+            <a:off x="640080" y="2872899"/>
+            <a:ext cx="5522976" cy="3320668"/>
+          </a:xfrm>
+        </p:spPr>
+        <p:txBody>
+          <a:bodyPr>
+            <a:normAutofit/>
+          </a:bodyPr>
+          <a:lstStyle/>
+          <a:p>
+            <a:pPr marL="0" indent="0">
+              <a:buNone/>
+            </a:pPr>
+            <a:r>
+              <a:rPr lang="en-US" sz="2200" dirty="0"/>
+              <a:t>Feedback: </a:t>
+            </a:r>
+          </a:p>
+          <a:p>
+            <a:pPr marL="0" indent="0">
+              <a:buNone/>
+            </a:pPr>
+            <a:r>
+              <a:rPr lang="en-US" sz="2200" dirty="0"/>
+              <a:t> </a:t>
+            </a:r>
+            <a:r>
+              <a:rPr lang="en-US" sz="2200" dirty="0">
+                <a:hlinkClick r:id="rId2"/>
+              </a:rPr>
+              <a:t>https://upgrad1.typeform.com/to/bSKs4OZV</a:t>
+            </a:r>
+            <a:r>
+              <a:rPr lang="en-US" sz="2200" dirty="0"/>
+              <a:t> </a:t>
+            </a:r>
+          </a:p>
+        </p:txBody>
+      </p:sp>
+      <p:pic>
+        <p:nvPicPr>
+          <p:cNvPr id="4" name="Picture 3">
+            <a:extLst>
+              <a:ext uri="{FF2B5EF4-FFF2-40B4-BE49-F238E27FC236}">
+                <a16:creationId xmlns:a16="http://schemas.microsoft.com/office/drawing/2014/main" id="{54C7798B-F35B-5EB7-1774-8DBF211D990F}"/>
+              </a:ext>
+            </a:extLst>
+          </p:cNvPr>
+          <p:cNvPicPr>
+            <a:picLocks noChangeAspect="1"/>
+          </p:cNvPicPr>
+          <p:nvPr/>
+        </p:nvPicPr>
+        <p:blipFill>
+          <a:blip r:embed="rId3"/>
+          <a:stretch>
+            <a:fillRect/>
+          </a:stretch>
+        </p:blipFill>
+        <p:spPr>
+          <a:xfrm>
+            <a:off x="6163056" y="526212"/>
+            <a:ext cx="5667355" cy="5667355"/>
+          </a:xfrm>
+          <a:prstGeom prst="rect">
+            <a:avLst/>
+          </a:prstGeom>
+        </p:spPr>
+      </p:pic>
+    </p:spTree>
+    <p:extLst>
+      <p:ext uri="{BB962C8B-B14F-4D97-AF65-F5344CB8AC3E}">
+        <p14:creationId xmlns:p14="http://schemas.microsoft.com/office/powerpoint/2010/main" val="1275153360"/>
+      </p:ext>
+    </p:extLst>
+  </p:cSld>
+  <p:clrMapOvr>
+    <a:masterClrMapping/>
+  </p:clrMapOvr>
+</p:sld>
+</file>
+
+<file path=ppt/slides/slide23.xml><?xml version="1.0" encoding="utf-8"?>
+<p:sld xmlns:a="http://schemas.openxmlformats.org/drawingml/2006/main" xmlns:r="http://schemas.openxmlformats.org/officeDocument/2006/relationships" xmlns:p="http://schemas.openxmlformats.org/presentationml/2006/main">
+  <p:cSld>
+    <p:spTree>
+      <p:nvGrpSpPr>
+        <p:cNvPr id="1" name="">
+          <a:extLst>
+            <a:ext uri="{FF2B5EF4-FFF2-40B4-BE49-F238E27FC236}">
+              <a16:creationId xmlns:a16="http://schemas.microsoft.com/office/drawing/2014/main" id="{110C7FD0-3E99-A869-3780-C07BACCAE887}"/>
+            </a:ext>
+          </a:extLst>
+        </p:cNvPr>
+        <p:cNvGrpSpPr/>
+        <p:nvPr/>
+      </p:nvGrpSpPr>
+      <p:grpSpPr>
+        <a:xfrm>
+          <a:off x="0" y="0"/>
+          <a:ext cx="0" cy="0"/>
+          <a:chOff x="0" y="0"/>
+          <a:chExt cx="0" cy="0"/>
+        </a:xfrm>
+      </p:grpSpPr>
+      <p:sp>
+        <p:nvSpPr>
+          <p:cNvPr id="2" name="Title 1">
+            <a:extLst>
+              <a:ext uri="{FF2B5EF4-FFF2-40B4-BE49-F238E27FC236}">
+                <a16:creationId xmlns:a16="http://schemas.microsoft.com/office/drawing/2014/main" id="{5865B82A-2973-1ADF-E3FA-388841F89002}"/>
+              </a:ext>
+            </a:extLst>
+          </p:cNvPr>
+          <p:cNvSpPr>
+            <a:spLocks noGrp="1"/>
+          </p:cNvSpPr>
+          <p:nvPr>
+            <p:ph type="title"/>
+          </p:nvPr>
+        </p:nvSpPr>
+        <p:spPr>
+          <a:xfrm>
+            <a:off x="640080" y="325369"/>
+            <a:ext cx="4368602" cy="1956841"/>
+          </a:xfrm>
+        </p:spPr>
+        <p:txBody>
+          <a:bodyPr anchor="b">
+            <a:normAutofit/>
+          </a:bodyPr>
+          <a:lstStyle/>
+          <a:p>
+            <a:r>
+              <a:rPr lang="en-US" sz="5400"/>
+              <a:t>Thank you</a:t>
+            </a:r>
+            <a:endParaRPr lang="en-IN" sz="5400"/>
+          </a:p>
+        </p:txBody>
+      </p:sp>
+      <p:sp>
+        <p:nvSpPr>
+          <p:cNvPr id="18" name="Content Placeholder 17">
+            <a:extLst>
+              <a:ext uri="{FF2B5EF4-FFF2-40B4-BE49-F238E27FC236}">
+                <a16:creationId xmlns:a16="http://schemas.microsoft.com/office/drawing/2014/main" id="{3F548811-594B-0E33-DA8A-71AFAFE6B5EB}"/>
+              </a:ext>
+            </a:extLst>
+          </p:cNvPr>
+          <p:cNvSpPr>
+            <a:spLocks noGrp="1"/>
+          </p:cNvSpPr>
+          <p:nvPr>
+            <p:ph idx="1"/>
+          </p:nvPr>
+        </p:nvSpPr>
+        <p:spPr>
+          <a:xfrm>
+            <a:off x="640080" y="2872899"/>
+            <a:ext cx="5788152" cy="3320668"/>
+          </a:xfrm>
+        </p:spPr>
+        <p:txBody>
+          <a:bodyPr>
+            <a:normAutofit/>
+          </a:bodyPr>
+          <a:lstStyle/>
+          <a:p>
+            <a:pPr marL="0" indent="0">
+              <a:buNone/>
+            </a:pPr>
+            <a:r>
+              <a:rPr lang="en-US" sz="2200" dirty="0"/>
+              <a:t>Post-Assessment: </a:t>
+            </a:r>
+          </a:p>
+          <a:p>
+            <a:pPr marL="0" indent="0">
+              <a:buNone/>
+            </a:pPr>
+            <a:r>
+              <a:rPr lang="en-US" sz="2200" dirty="0"/>
+              <a:t>  </a:t>
+            </a:r>
+            <a:r>
+              <a:rPr lang="en-US" sz="2200" dirty="0">
+                <a:hlinkClick r:id="rId2"/>
+              </a:rPr>
+              <a:t>https://forms.cloud.microsoft/r/z749XzLRCR</a:t>
+            </a:r>
+            <a:r>
+              <a:rPr lang="en-US" sz="2200" dirty="0"/>
+              <a:t> </a:t>
+            </a:r>
+          </a:p>
+        </p:txBody>
+      </p:sp>
+      <p:pic>
+        <p:nvPicPr>
+          <p:cNvPr id="5" name="Picture 4">
+            <a:extLst>
+              <a:ext uri="{FF2B5EF4-FFF2-40B4-BE49-F238E27FC236}">
+                <a16:creationId xmlns:a16="http://schemas.microsoft.com/office/drawing/2014/main" id="{05B7EF72-F646-AD67-775A-2A0CEE290F88}"/>
+              </a:ext>
+            </a:extLst>
+          </p:cNvPr>
+          <p:cNvPicPr>
+            <a:picLocks noChangeAspect="1"/>
+          </p:cNvPicPr>
+          <p:nvPr/>
+        </p:nvPicPr>
+        <p:blipFill>
+          <a:blip r:embed="rId3"/>
+          <a:stretch>
+            <a:fillRect/>
+          </a:stretch>
+        </p:blipFill>
+        <p:spPr>
+          <a:xfrm>
+            <a:off x="6428232" y="714375"/>
+            <a:ext cx="5429250" cy="5429250"/>
+          </a:xfrm>
+          <a:prstGeom prst="rect">
+            <a:avLst/>
+          </a:prstGeom>
+        </p:spPr>
+      </p:pic>
+    </p:spTree>
+    <p:extLst>
+      <p:ext uri="{BB962C8B-B14F-4D97-AF65-F5344CB8AC3E}">
+        <p14:creationId xmlns:p14="http://schemas.microsoft.com/office/powerpoint/2010/main" val="1522722716"/>
+      </p:ext>
+    </p:extLst>
+  </p:cSld>
+  <p:clrMapOvr>
+    <a:masterClrMapping/>
+  </p:clrMapOvr>
+</p:sld>
+</file>
+
+<file path=ppt/slides/slide3.xml><?xml version="1.0" encoding="utf-8"?>
 <p:sld xmlns:a="http://schemas.openxmlformats.org/drawingml/2006/main" xmlns:r="http://schemas.openxmlformats.org/officeDocument/2006/relationships" xmlns:p="http://schemas.openxmlformats.org/presentationml/2006/main">
   <p:cSld>
     <p:bg>
@@ -9253,99 +10230,7 @@
 </p:sld>
 </file>
 
-<file path=ppt/slides/slide20.xml><?xml version="1.0" encoding="utf-8"?>
-<p:sld xmlns:a="http://schemas.openxmlformats.org/drawingml/2006/main" xmlns:r="http://schemas.openxmlformats.org/officeDocument/2006/relationships" xmlns:p="http://schemas.openxmlformats.org/presentationml/2006/main">
-  <p:cSld>
-    <p:spTree>
-      <p:nvGrpSpPr>
-        <p:cNvPr id="1" name="">
-          <a:extLst>
-            <a:ext uri="{FF2B5EF4-FFF2-40B4-BE49-F238E27FC236}">
-              <a16:creationId xmlns:a16="http://schemas.microsoft.com/office/drawing/2014/main" id="{6B266804-B56F-083C-3F6B-0DF22CC19151}"/>
-            </a:ext>
-          </a:extLst>
-        </p:cNvPr>
-        <p:cNvGrpSpPr/>
-        <p:nvPr/>
-      </p:nvGrpSpPr>
-      <p:grpSpPr>
-        <a:xfrm>
-          <a:off x="0" y="0"/>
-          <a:ext cx="0" cy="0"/>
-          <a:chOff x="0" y="0"/>
-          <a:chExt cx="0" cy="0"/>
-        </a:xfrm>
-      </p:grpSpPr>
-      <p:sp>
-        <p:nvSpPr>
-          <p:cNvPr id="2" name="Title 1">
-            <a:extLst>
-              <a:ext uri="{FF2B5EF4-FFF2-40B4-BE49-F238E27FC236}">
-                <a16:creationId xmlns:a16="http://schemas.microsoft.com/office/drawing/2014/main" id="{B6A952B5-46D9-5C09-0C9A-0DD2CD24BB21}"/>
-              </a:ext>
-            </a:extLst>
-          </p:cNvPr>
-          <p:cNvSpPr>
-            <a:spLocks noGrp="1"/>
-          </p:cNvSpPr>
-          <p:nvPr>
-            <p:ph type="title"/>
-          </p:nvPr>
-        </p:nvSpPr>
-        <p:spPr/>
-        <p:txBody>
-          <a:bodyPr/>
-          <a:lstStyle/>
-          <a:p>
-            <a:r>
-              <a:rPr lang="en-US" dirty="0"/>
-              <a:t>Thank you</a:t>
-            </a:r>
-            <a:endParaRPr lang="en-IN" dirty="0"/>
-          </a:p>
-        </p:txBody>
-      </p:sp>
-      <p:sp>
-        <p:nvSpPr>
-          <p:cNvPr id="3" name="Content Placeholder 2">
-            <a:extLst>
-              <a:ext uri="{FF2B5EF4-FFF2-40B4-BE49-F238E27FC236}">
-                <a16:creationId xmlns:a16="http://schemas.microsoft.com/office/drawing/2014/main" id="{C7479826-5E44-C184-8C42-0C25F6EB1764}"/>
-              </a:ext>
-            </a:extLst>
-          </p:cNvPr>
-          <p:cNvSpPr>
-            <a:spLocks noGrp="1"/>
-          </p:cNvSpPr>
-          <p:nvPr>
-            <p:ph idx="1"/>
-          </p:nvPr>
-        </p:nvSpPr>
-        <p:spPr/>
-        <p:txBody>
-          <a:bodyPr>
-            <a:normAutofit/>
-          </a:bodyPr>
-          <a:lstStyle/>
-          <a:p>
-            <a:endParaRPr lang="en-IN" dirty="0"/>
-          </a:p>
-        </p:txBody>
-      </p:sp>
-    </p:spTree>
-    <p:extLst>
-      <p:ext uri="{BB962C8B-B14F-4D97-AF65-F5344CB8AC3E}">
-        <p14:creationId xmlns:p14="http://schemas.microsoft.com/office/powerpoint/2010/main" val="1007775515"/>
-      </p:ext>
-    </p:extLst>
-  </p:cSld>
-  <p:clrMapOvr>
-    <a:masterClrMapping/>
-  </p:clrMapOvr>
-</p:sld>
-</file>
-
-<file path=ppt/slides/slide3.xml><?xml version="1.0" encoding="utf-8"?>
+<file path=ppt/slides/slide4.xml><?xml version="1.0" encoding="utf-8"?>
 <p:sld xmlns:a="http://schemas.openxmlformats.org/drawingml/2006/main" xmlns:r="http://schemas.openxmlformats.org/officeDocument/2006/relationships" xmlns:p="http://schemas.openxmlformats.org/presentationml/2006/main">
   <p:cSld>
     <p:bg>
@@ -9511,7 +10396,7 @@
 </p:sld>
 </file>
 
-<file path=ppt/slides/slide4.xml><?xml version="1.0" encoding="utf-8"?>
+<file path=ppt/slides/slide5.xml><?xml version="1.0" encoding="utf-8"?>
 <p:sld xmlns:a="http://schemas.openxmlformats.org/drawingml/2006/main" xmlns:r="http://schemas.openxmlformats.org/officeDocument/2006/relationships" xmlns:p="http://schemas.openxmlformats.org/presentationml/2006/main">
   <p:cSld>
     <p:spTree>
@@ -9686,7 +10571,7 @@
 </p:sld>
 </file>
 
-<file path=ppt/slides/slide5.xml><?xml version="1.0" encoding="utf-8"?>
+<file path=ppt/slides/slide6.xml><?xml version="1.0" encoding="utf-8"?>
 <p:sld xmlns:a="http://schemas.openxmlformats.org/drawingml/2006/main" xmlns:r="http://schemas.openxmlformats.org/officeDocument/2006/relationships" xmlns:p="http://schemas.openxmlformats.org/presentationml/2006/main">
   <p:cSld>
     <p:spTree>
@@ -9931,7 +10816,7 @@
 </p:sld>
 </file>
 
-<file path=ppt/slides/slide6.xml><?xml version="1.0" encoding="utf-8"?>
+<file path=ppt/slides/slide7.xml><?xml version="1.0" encoding="utf-8"?>
 <p:sld xmlns:a="http://schemas.openxmlformats.org/drawingml/2006/main" xmlns:r="http://schemas.openxmlformats.org/officeDocument/2006/relationships" xmlns:p="http://schemas.openxmlformats.org/presentationml/2006/main">
   <p:cSld>
     <p:spTree>
@@ -10136,7 +11021,7 @@
 </p:sld>
 </file>
 
-<file path=ppt/slides/slide7.xml><?xml version="1.0" encoding="utf-8"?>
+<file path=ppt/slides/slide8.xml><?xml version="1.0" encoding="utf-8"?>
 <p:sld xmlns:a="http://schemas.openxmlformats.org/drawingml/2006/main" xmlns:r="http://schemas.openxmlformats.org/officeDocument/2006/relationships" xmlns:p="http://schemas.openxmlformats.org/presentationml/2006/main">
   <p:cSld>
     <p:spTree>
@@ -10620,7 +11505,7 @@
 </p:sld>
 </file>
 
-<file path=ppt/slides/slide8.xml><?xml version="1.0" encoding="utf-8"?>
+<file path=ppt/slides/slide9.xml><?xml version="1.0" encoding="utf-8"?>
 <p:sld xmlns:a="http://schemas.openxmlformats.org/drawingml/2006/main" xmlns:r="http://schemas.openxmlformats.org/officeDocument/2006/relationships" xmlns:p="http://schemas.openxmlformats.org/presentationml/2006/main">
   <p:cSld>
     <p:bg>
@@ -10788,195 +11673,6 @@
   </p:cSld>
   <p:clrMapOvr>
     <a:overrideClrMapping bg1="dk1" tx1="lt1" bg2="dk2" tx2="lt2" accent1="accent1" accent2="accent2" accent3="accent3" accent4="accent4" accent5="accent5" accent6="accent6" hlink="hlink" folHlink="folHlink"/>
-  </p:clrMapOvr>
-</p:sld>
-</file>
-
-<file path=ppt/slides/slide9.xml><?xml version="1.0" encoding="utf-8"?>
-<p:sld xmlns:a="http://schemas.openxmlformats.org/drawingml/2006/main" xmlns:r="http://schemas.openxmlformats.org/officeDocument/2006/relationships" xmlns:p="http://schemas.openxmlformats.org/presentationml/2006/main">
-  <p:cSld>
-    <p:spTree>
-      <p:nvGrpSpPr>
-        <p:cNvPr id="1" name="">
-          <a:extLst>
-            <a:ext uri="{FF2B5EF4-FFF2-40B4-BE49-F238E27FC236}">
-              <a16:creationId xmlns:a16="http://schemas.microsoft.com/office/drawing/2014/main" id="{6D01CF05-4DDB-0A5D-FCE5-CA24F427A176}"/>
-            </a:ext>
-          </a:extLst>
-        </p:cNvPr>
-        <p:cNvGrpSpPr/>
-        <p:nvPr/>
-      </p:nvGrpSpPr>
-      <p:grpSpPr>
-        <a:xfrm>
-          <a:off x="0" y="0"/>
-          <a:ext cx="0" cy="0"/>
-          <a:chOff x="0" y="0"/>
-          <a:chExt cx="0" cy="0"/>
-        </a:xfrm>
-      </p:grpSpPr>
-      <p:sp>
-        <p:nvSpPr>
-          <p:cNvPr id="2" name="Title 1">
-            <a:extLst>
-              <a:ext uri="{FF2B5EF4-FFF2-40B4-BE49-F238E27FC236}">
-                <a16:creationId xmlns:a16="http://schemas.microsoft.com/office/drawing/2014/main" id="{BD478CC1-084D-117C-D2A4-5CB3597EBF70}"/>
-              </a:ext>
-            </a:extLst>
-          </p:cNvPr>
-          <p:cNvSpPr>
-            <a:spLocks noGrp="1"/>
-          </p:cNvSpPr>
-          <p:nvPr>
-            <p:ph type="title"/>
-          </p:nvPr>
-        </p:nvSpPr>
-        <p:spPr/>
-        <p:txBody>
-          <a:bodyPr/>
-          <a:lstStyle/>
-          <a:p>
-            <a:r>
-              <a:rPr lang="en-IN" dirty="0"/>
-              <a:t>Latency Optimization</a:t>
-            </a:r>
-          </a:p>
-        </p:txBody>
-      </p:sp>
-      <p:sp>
-        <p:nvSpPr>
-          <p:cNvPr id="3" name="Content Placeholder 2">
-            <a:extLst>
-              <a:ext uri="{FF2B5EF4-FFF2-40B4-BE49-F238E27FC236}">
-                <a16:creationId xmlns:a16="http://schemas.microsoft.com/office/drawing/2014/main" id="{BF342CF7-D1F3-9C7D-F1BD-677E78DB93E0}"/>
-              </a:ext>
-            </a:extLst>
-          </p:cNvPr>
-          <p:cNvSpPr>
-            <a:spLocks noGrp="1"/>
-          </p:cNvSpPr>
-          <p:nvPr>
-            <p:ph idx="1"/>
-          </p:nvPr>
-        </p:nvSpPr>
-        <p:spPr/>
-        <p:txBody>
-          <a:bodyPr>
-            <a:normAutofit fontScale="92500" lnSpcReduction="20000"/>
-          </a:bodyPr>
-          <a:lstStyle/>
-          <a:p>
-            <a:r>
-              <a:rPr lang="en-US" b="1" dirty="0"/>
-              <a:t>Async LLM Calls</a:t>
-            </a:r>
-          </a:p>
-          <a:p>
-            <a:pPr lvl="1"/>
-            <a:r>
-              <a:rPr lang="en-US" b="1" dirty="0"/>
-              <a:t>Idea</a:t>
-            </a:r>
-          </a:p>
-          <a:p>
-            <a:pPr lvl="2"/>
-            <a:r>
-              <a:rPr lang="en-US" dirty="0"/>
-              <a:t>Don’t wait for one call to finish before starting another</a:t>
-            </a:r>
-          </a:p>
-          <a:p>
-            <a:pPr lvl="1"/>
-            <a:endParaRPr lang="en-US" b="1" dirty="0"/>
-          </a:p>
-          <a:p>
-            <a:pPr lvl="1"/>
-            <a:r>
-              <a:rPr lang="en-US" b="1" dirty="0"/>
-              <a:t>Example</a:t>
-            </a:r>
-          </a:p>
-          <a:p>
-            <a:pPr lvl="2"/>
-            <a:r>
-              <a:rPr lang="en-US" dirty="0"/>
-              <a:t>Instead of:</a:t>
-            </a:r>
-          </a:p>
-          <a:p>
-            <a:pPr lvl="3"/>
-            <a:r>
-              <a:rPr lang="en-US" dirty="0"/>
-              <a:t>Get summary </a:t>
-            </a:r>
-          </a:p>
-          <a:p>
-            <a:pPr lvl="3"/>
-            <a:r>
-              <a:rPr lang="en-US" dirty="0"/>
-              <a:t>Then generate keywords </a:t>
-            </a:r>
-          </a:p>
-          <a:p>
-            <a:pPr lvl="3"/>
-            <a:r>
-              <a:rPr lang="en-US" dirty="0"/>
-              <a:t>Then classify </a:t>
-            </a:r>
-          </a:p>
-          <a:p>
-            <a:pPr lvl="3"/>
-            <a:r>
-              <a:rPr lang="en-US" dirty="0"/>
-              <a:t>Do:</a:t>
-            </a:r>
-          </a:p>
-          <a:p>
-            <a:pPr lvl="4"/>
-            <a:r>
-              <a:rPr lang="en-US" dirty="0"/>
-              <a:t>Run all 3 at the same time</a:t>
-            </a:r>
-          </a:p>
-          <a:p>
-            <a:pPr lvl="2"/>
-            <a:endParaRPr lang="en-US" b="1" dirty="0"/>
-          </a:p>
-          <a:p>
-            <a:pPr lvl="2"/>
-            <a:r>
-              <a:rPr lang="en-US" b="1" dirty="0"/>
-              <a:t>Result</a:t>
-            </a:r>
-          </a:p>
-          <a:p>
-            <a:pPr lvl="3"/>
-            <a:r>
-              <a:rPr lang="en-US" dirty="0"/>
-              <a:t>Sequential: 6 seconds </a:t>
-            </a:r>
-          </a:p>
-          <a:p>
-            <a:pPr lvl="3"/>
-            <a:r>
-              <a:rPr lang="en-US" dirty="0"/>
-              <a:t>Async: 2 seconds</a:t>
-            </a:r>
-          </a:p>
-          <a:p>
-            <a:endParaRPr lang="en-US" dirty="0"/>
-          </a:p>
-        </p:txBody>
-      </p:sp>
-    </p:spTree>
-    <p:extLst>
-      <p:ext uri="{BB962C8B-B14F-4D97-AF65-F5344CB8AC3E}">
-        <p14:creationId xmlns:p14="http://schemas.microsoft.com/office/powerpoint/2010/main" val="2153786112"/>
-      </p:ext>
-    </p:extLst>
-  </p:cSld>
-  <p:clrMapOvr>
-    <a:masterClrMapping/>
   </p:clrMapOvr>
 </p:sld>
 </file>
